--- a/JeremysShit/RISE_Poster_2026.pptx
+++ b/JeremysShit/RISE_Poster_2026.pptx
@@ -3853,7 +3853,7 @@
                   <a:srgbClr val="1A1A1A"/>
                 </a:solidFill>
               </a:rPr>
-              <a:t>15,736 newspaper pages</a:t>
+              <a:t>15,721 newspaper pages</a:t>
             </a:r>
           </a:p>
           <a:p>
@@ -3868,7 +3868,7 @@
                   <a:srgbClr val="1A1A1A"/>
                 </a:solidFill>
               </a:rPr>
-              <a:t>Library of Congress Chronicling America. Every month from 1900-01 to 1963-12 — 768 of 768 months, no gaps. A fixed, direction-neutral search phrase set, held constant across all months.</a:t>
+              <a:t>Library of Congress Chronicling America. Sampled from every one of the 768 months from 1900-01 to 1963-12, with no gaps, using a fixed direction-neutral search phrase set held constant across all months. 761 of those months yield at least one scorable US-national forecast.</a:t>
             </a:r>
           </a:p>
           <a:p>
@@ -4034,7 +4034,7 @@
         <p:spPr>
           <a:xfrm>
             <a:off x="10149840" y="6675120"/>
-            <a:ext cx="12801600" cy="1280160"/>
+            <a:ext cx="12801600" cy="731520"/>
           </a:xfrm>
           <a:prstGeom prst="rect">
             <a:avLst/>
@@ -4053,7 +4053,7 @@
               </a:spcAft>
             </a:pPr>
             <a:r>
-              <a:rPr sz="3400" b="1">
+              <a:rPr sz="3000" b="1">
                 <a:solidFill>
                   <a:srgbClr val="1A1A1A"/>
                 </a:solidFill>
@@ -4079,8 +4079,8 @@
         </p:blipFill>
         <p:spPr>
           <a:xfrm>
-            <a:off x="10149840" y="8046720"/>
-            <a:ext cx="12801600" cy="4934845"/>
+            <a:off x="11292840" y="7406640"/>
+            <a:ext cx="10515600" cy="4053623"/>
           </a:xfrm>
           <a:prstGeom prst="rect">
             <a:avLst/>
@@ -4095,8 +4095,8 @@
         </p:nvSpPr>
         <p:spPr>
           <a:xfrm>
-            <a:off x="10149840" y="13075920"/>
-            <a:ext cx="12801600" cy="1097280"/>
+            <a:off x="10149840" y="11551702"/>
+            <a:ext cx="12801600" cy="960120"/>
           </a:xfrm>
           <a:prstGeom prst="rect">
             <a:avLst/>
@@ -4120,7 +4120,7 @@
                   <a:srgbClr val="5A5A5A"/>
                 </a:solidFill>
               </a:rPr>
-              <a:t>Downbeat forecasts were 24.1% of the total in expansions and 24.3% in recessions — identical. About 72% of all forecasts were upbeat, in booms and busts alike.</a:t>
+              <a:t>Downbeat forecasts were 24.1% of the total in expansions and 24.3% in recessions — identical. About 72% of all forecasts were upbeat, in booms and busts alike. This survives a within-decade comparison and a block bootstrap.</a:t>
             </a:r>
           </a:p>
         </p:txBody>
@@ -4133,8 +4133,8 @@
         </p:nvSpPr>
         <p:spPr>
           <a:xfrm>
-            <a:off x="10149840" y="14630400"/>
-            <a:ext cx="12801600" cy="1280160"/>
+            <a:off x="10149840" y="12740422"/>
+            <a:ext cx="12801600" cy="731520"/>
           </a:xfrm>
           <a:prstGeom prst="rect">
             <a:avLst/>
@@ -4153,7 +4153,7 @@
               </a:spcAft>
             </a:pPr>
             <a:r>
-              <a:rPr sz="3400" b="1">
+              <a:rPr sz="3000" b="1">
                 <a:solidFill>
                   <a:srgbClr val="1A1A1A"/>
                 </a:solidFill>
@@ -4179,8 +4179,8 @@
         </p:blipFill>
         <p:spPr>
           <a:xfrm>
-            <a:off x="10149840" y="16002000"/>
-            <a:ext cx="12801600" cy="5548699"/>
+            <a:off x="11292840" y="13471942"/>
+            <a:ext cx="10515600" cy="4557860"/>
           </a:xfrm>
           <a:prstGeom prst="rect">
             <a:avLst/>
@@ -4195,8 +4195,8 @@
         </p:nvSpPr>
         <p:spPr>
           <a:xfrm>
-            <a:off x="10149840" y="22311360"/>
-            <a:ext cx="12801600" cy="1280160"/>
+            <a:off x="10149840" y="18121242"/>
+            <a:ext cx="12801600" cy="960120"/>
           </a:xfrm>
           <a:prstGeom prst="rect">
             <a:avLst/>
@@ -4220,7 +4220,7 @@
                   <a:srgbClr val="5A5A5A"/>
                 </a:solidFill>
               </a:rPr>
-              <a:t>Overall accuracy fell from 58.8% in expansions to 39.7% in recessions (gap +18.7 points, 95% CI [+12.1, +24.8], block-bootstrapped by 3-year period). Pessimists were right when it counted — there were never enough of them.</a:t>
+              <a:t>Because the mix never moved, accuracy fell from 58.8% in expansions to 39.7% in recessions — a consequence of panel 1, not a separate finding (gap +19.1% points, 95% CI [+12.9, +24.4]). Pessimists were right when it counted; there were never enough of them.</a:t>
             </a:r>
           </a:p>
         </p:txBody>
@@ -4233,8 +4233,8 @@
         </p:nvSpPr>
         <p:spPr>
           <a:xfrm>
-            <a:off x="10149840" y="24140160"/>
-            <a:ext cx="12801600" cy="1280160"/>
+            <a:off x="10149840" y="19309962"/>
+            <a:ext cx="12801600" cy="731520"/>
           </a:xfrm>
           <a:prstGeom prst="rect">
             <a:avLst/>
@@ -4253,7 +4253,7 @@
               </a:spcAft>
             </a:pPr>
             <a:r>
-              <a:rPr sz="3400" b="1">
+              <a:rPr sz="3000" b="1">
                 <a:solidFill>
                   <a:srgbClr val="1A1A1A"/>
                 </a:solidFill>
@@ -4279,8 +4279,8 @@
         </p:blipFill>
         <p:spPr>
           <a:xfrm>
-            <a:off x="10149840" y="25511760"/>
-            <a:ext cx="12801600" cy="5001363"/>
+            <a:off x="11292840" y="20041482"/>
+            <a:ext cx="10515600" cy="4108263"/>
           </a:xfrm>
           <a:prstGeom prst="rect">
             <a:avLst/>
@@ -4295,8 +4295,8 @@
         </p:nvSpPr>
         <p:spPr>
           <a:xfrm>
-            <a:off x="10149840" y="30815279"/>
-            <a:ext cx="12801600" cy="1280160"/>
+            <a:off x="10149840" y="24241184"/>
+            <a:ext cx="12801600" cy="960120"/>
           </a:xfrm>
           <a:prstGeom prst="rect">
             <a:avLst/>
@@ -4333,8 +4333,8 @@
         </p:nvSpPr>
         <p:spPr>
           <a:xfrm>
-            <a:off x="10149840" y="32552640"/>
-            <a:ext cx="12801600" cy="1280160"/>
+            <a:off x="10149840" y="25429904"/>
+            <a:ext cx="12801600" cy="731520"/>
           </a:xfrm>
           <a:prstGeom prst="rect">
             <a:avLst/>
@@ -4353,7 +4353,7 @@
               </a:spcAft>
             </a:pPr>
             <a:r>
-              <a:rPr sz="3400" b="1">
+              <a:rPr sz="3000" b="1">
                 <a:solidFill>
                   <a:srgbClr val="1A1A1A"/>
                 </a:solidFill>
@@ -4379,8 +4379,8 @@
         </p:blipFill>
         <p:spPr>
           <a:xfrm>
-            <a:off x="10149840" y="33924240"/>
-            <a:ext cx="12801600" cy="5220070"/>
+            <a:off x="11292840" y="26161424"/>
+            <a:ext cx="10515600" cy="4287915"/>
           </a:xfrm>
           <a:prstGeom prst="rect">
             <a:avLst/>
@@ -4395,8 +4395,8 @@
         </p:nvSpPr>
         <p:spPr>
           <a:xfrm>
-            <a:off x="10149840" y="40599360"/>
-            <a:ext cx="12801600" cy="1828800"/>
+            <a:off x="10149840" y="30540779"/>
+            <a:ext cx="12801600" cy="960120"/>
           </a:xfrm>
           <a:prstGeom prst="rect">
             <a:avLst/>
@@ -4433,6 +4433,206 @@
         </p:nvSpPr>
         <p:spPr>
           <a:xfrm>
+            <a:off x="10149840" y="31729499"/>
+            <a:ext cx="12801600" cy="731520"/>
+          </a:xfrm>
+          <a:prstGeom prst="rect">
+            <a:avLst/>
+          </a:prstGeom>
+          <a:noFill/>
+        </p:spPr>
+        <p:txBody>
+          <a:bodyPr wrap="square">
+            <a:spAutoFit/>
+          </a:bodyPr>
+          <a:lstStyle/>
+          <a:p>
+            <a:pPr>
+              <a:spcAft>
+                <a:spcPts val="0"/>
+              </a:spcAft>
+            </a:pPr>
+            <a:r>
+              <a:rPr sz="3000" b="1">
+                <a:solidFill>
+                  <a:srgbClr val="1A1A1A"/>
+                </a:solidFill>
+              </a:rPr>
+              <a:t>5.  Worse than chance on prices, markets and jobs</a:t>
+            </a:r>
+          </a:p>
+        </p:txBody>
+      </p:sp>
+      <p:pic>
+        <p:nvPicPr>
+          <p:cNvPr id="50" name="Picture 49" descr="figF_topics.png"/>
+          <p:cNvPicPr>
+            <a:picLocks noChangeAspect="1"/>
+          </p:cNvPicPr>
+          <p:nvPr/>
+        </p:nvPicPr>
+        <p:blipFill>
+          <a:blip r:embed="rId8"/>
+          <a:stretch>
+            <a:fillRect/>
+          </a:stretch>
+        </p:blipFill>
+        <p:spPr>
+          <a:xfrm>
+            <a:off x="11292840" y="32461019"/>
+            <a:ext cx="10515600" cy="3497058"/>
+          </a:xfrm>
+          <a:prstGeom prst="rect">
+            <a:avLst/>
+          </a:prstGeom>
+        </p:spPr>
+      </p:pic>
+      <p:sp>
+        <p:nvSpPr>
+          <p:cNvPr id="51" name="TextBox 50"/>
+          <p:cNvSpPr txBox="1"/>
+          <p:nvPr/>
+        </p:nvSpPr>
+        <p:spPr>
+          <a:xfrm>
+            <a:off x="10149840" y="36049517"/>
+            <a:ext cx="12801600" cy="960120"/>
+          </a:xfrm>
+          <a:prstGeom prst="rect">
+            <a:avLst/>
+          </a:prstGeom>
+          <a:noFill/>
+        </p:spPr>
+        <p:txBody>
+          <a:bodyPr wrap="square">
+            <a:spAutoFit/>
+          </a:bodyPr>
+          <a:lstStyle/>
+          <a:p>
+            <a:pPr>
+              <a:spcAft>
+                <a:spcPts val="0"/>
+              </a:spcAft>
+            </a:pPr>
+            <a:r>
+              <a:rPr sz="1900" b="0">
+                <a:solidFill>
+                  <a:srgbClr val="5A5A5A"/>
+                </a:solidFill>
+              </a:rPr>
+              <a:t>Accuracy varies far more by subject than by wording — a 23-point spread, against 2 points for hedging. The one above-chance category is vague optimism about “business”. Price calls track the era’s inflation regime, not skill: after 1948, “prices will fall” was right 0 times in 93.</a:t>
+            </a:r>
+          </a:p>
+        </p:txBody>
+      </p:sp>
+      <p:sp>
+        <p:nvSpPr>
+          <p:cNvPr id="52" name="TextBox 51"/>
+          <p:cNvSpPr txBox="1"/>
+          <p:nvPr/>
+        </p:nvSpPr>
+        <p:spPr>
+          <a:xfrm>
+            <a:off x="10149840" y="37238237"/>
+            <a:ext cx="12801600" cy="731520"/>
+          </a:xfrm>
+          <a:prstGeom prst="rect">
+            <a:avLst/>
+          </a:prstGeom>
+          <a:noFill/>
+        </p:spPr>
+        <p:txBody>
+          <a:bodyPr wrap="square">
+            <a:spAutoFit/>
+          </a:bodyPr>
+          <a:lstStyle/>
+          <a:p>
+            <a:pPr>
+              <a:spcAft>
+                <a:spcPts val="0"/>
+              </a:spcAft>
+            </a:pPr>
+            <a:r>
+              <a:rPr sz="3000" b="1">
+                <a:solidFill>
+                  <a:srgbClr val="1A1A1A"/>
+                </a:solidFill>
+              </a:rPr>
+              <a:t>6.  October 1929: no one saw it coming</a:t>
+            </a:r>
+          </a:p>
+        </p:txBody>
+      </p:sp>
+      <p:pic>
+        <p:nvPicPr>
+          <p:cNvPr id="53" name="Picture 52" descr="figG_1929.png"/>
+          <p:cNvPicPr>
+            <a:picLocks noChangeAspect="1"/>
+          </p:cNvPicPr>
+          <p:nvPr/>
+        </p:nvPicPr>
+        <p:blipFill>
+          <a:blip r:embed="rId9"/>
+          <a:stretch>
+            <a:fillRect/>
+          </a:stretch>
+        </p:blipFill>
+        <p:spPr>
+          <a:xfrm>
+            <a:off x="11292840" y="37969757"/>
+            <a:ext cx="10515600" cy="3468346"/>
+          </a:xfrm>
+          <a:prstGeom prst="rect">
+            <a:avLst/>
+          </a:prstGeom>
+        </p:spPr>
+      </p:pic>
+      <p:sp>
+        <p:nvSpPr>
+          <p:cNvPr id="54" name="TextBox 53"/>
+          <p:cNvSpPr txBox="1"/>
+          <p:nvPr/>
+        </p:nvSpPr>
+        <p:spPr>
+          <a:xfrm>
+            <a:off x="10149840" y="41529543"/>
+            <a:ext cx="12801600" cy="960120"/>
+          </a:xfrm>
+          <a:prstGeom prst="rect">
+            <a:avLst/>
+          </a:prstGeom>
+          <a:noFill/>
+        </p:spPr>
+        <p:txBody>
+          <a:bodyPr wrap="square">
+            <a:spAutoFit/>
+          </a:bodyPr>
+          <a:lstStyle/>
+          <a:p>
+            <a:pPr>
+              <a:spcAft>
+                <a:spcPts val="0"/>
+              </a:spcAft>
+            </a:pPr>
+            <a:r>
+              <a:rPr sz="1900" b="0">
+                <a:solidFill>
+                  <a:srgbClr val="5A5A5A"/>
+                </a:solidFill>
+              </a:rPr>
+              <a:t>In the month of the Great Crash, 86% of US-national forecasts still predicted improvement — more than in June. Forecasts printed August–December 1929 came true 20.8% of the time. Found with no episode labels and no outcome information.</a:t>
+            </a:r>
+          </a:p>
+        </p:txBody>
+      </p:sp>
+      <p:sp>
+        <p:nvSpPr>
+          <p:cNvPr id="55" name="TextBox 54"/>
+          <p:cNvSpPr txBox="1"/>
+          <p:nvPr/>
+        </p:nvSpPr>
+        <p:spPr>
+          <a:xfrm>
             <a:off x="24597360" y="7863840"/>
             <a:ext cx="7223760" cy="25603200"/>
           </a:xfrm>
@@ -4494,7 +4694,7 @@
           <a:p>
             <a:pPr>
               <a:spcAft>
-                <a:spcPts val="1800"/>
+                <a:spcPts val="1400"/>
               </a:spcAft>
             </a:pPr>
             <a:r>
@@ -4518,7 +4718,22 @@
                   <a:srgbClr val="1A1A1A"/>
                 </a:solidFill>
               </a:rPr>
-              <a:t>Limitations</a:t>
+              <a:t>Nor is this only a newspaper problem</a:t>
+            </a:r>
+          </a:p>
+          <a:p>
+            <a:pPr>
+              <a:spcAft>
+                <a:spcPts val="1800"/>
+              </a:spcAft>
+            </a:pPr>
+            <a:r>
+              <a:rPr sz="2100" b="0">
+                <a:solidFill>
+                  <a:srgbClr val="1A1A1A"/>
+                </a:solidFill>
+              </a:rPr>
+              <a:t>Scored the same way, the Federal Reserve’s own internal Greenbook forecasts (490, 1967–2020) come in at 54.0% — and they called a downturn just 6 times, getting 0% of those right. Different era and variable, so this is a reference point rather than a controlled comparison — but directional forecasting is hard for everyone.</a:t>
             </a:r>
           </a:p>
           <a:p>
@@ -4528,12 +4743,12 @@
               </a:spcAft>
             </a:pPr>
             <a:r>
-              <a:rPr sz="2100" b="0">
+              <a:rPr sz="2600" b="1">
                 <a:solidFill>
                   <a:srgbClr val="1A1A1A"/>
                 </a:solidFill>
               </a:rPr>
-              <a:t>•  The monthly corpus used a cheaper extractor (F1≈0.61) than the methods comparison (F1≈0.79), to fit a $25 budget.</a:t>
+              <a:t>Limitations</a:t>
             </a:r>
           </a:p>
           <a:p>
@@ -4548,7 +4763,7 @@
                   <a:srgbClr val="1A1A1A"/>
                 </a:solidFill>
               </a:rPr>
-              <a:t>•  The gold standard is model-adjudicated; a two-person human recode is the next step.</a:t>
+              <a:t>•  The monthly corpus used a cheaper extractor (F1≈0.53–0.61, depending on the reasoning-effort setting, which the run log does not record) than the methods comparison (F1≈0.79), to fit a $25 budget.</a:t>
             </a:r>
           </a:p>
           <a:p>
@@ -4563,7 +4778,7 @@
                   <a:srgbClr val="1A1A1A"/>
                 </a:solidFill>
               </a:rPr>
-              <a:t>•  Digitization thins after 1940, so the late series is noisier.</a:t>
+              <a:t>•  The gold standard is model-adjudicated; a two-person human recode is the next step.</a:t>
             </a:r>
           </a:p>
           <a:p>
@@ -4578,6 +4793,21 @@
                   <a:srgbClr val="1A1A1A"/>
                 </a:solidFill>
               </a:rPr>
+              <a:t>•  Digitization thins after 1940, so the late series is noisier.</a:t>
+            </a:r>
+          </a:p>
+          <a:p>
+            <a:pPr>
+              <a:spcAft>
+                <a:spcPts val="600"/>
+              </a:spcAft>
+            </a:pPr>
+            <a:r>
+              <a:rPr sz="2100" b="0">
+                <a:solidFill>
+                  <a:srgbClr val="1A1A1A"/>
+                </a:solidFill>
+              </a:rPr>
               <a:t>•  Our index does not correlate with the published historical policy-uncertainty index (|r|&lt;0.08) — we measure forecast direction, a different construct. We report the null.</a:t>
             </a:r>
           </a:p>
@@ -4630,7 +4860,7 @@
       </p:sp>
       <p:sp>
         <p:nvSpPr>
-          <p:cNvPr id="50" name="TextBox 49"/>
+          <p:cNvPr id="56" name="TextBox 55"/>
           <p:cNvSpPr txBox="1"/>
           <p:nvPr/>
         </p:nvSpPr>
@@ -4668,7 +4898,7 @@
       </p:sp>
       <p:sp>
         <p:nvSpPr>
-          <p:cNvPr id="51" name="TextBox 50"/>
+          <p:cNvPr id="57" name="TextBox 56"/>
           <p:cNvSpPr txBox="1"/>
           <p:nvPr/>
         </p:nvSpPr>
